--- a/java-word-counter/java-word-counter_발표자료_2026-10-01.pptx
+++ b/java-word-counter/java-word-counter_발표자료_2026-10-01.pptx
@@ -2728,7 +2728,7 @@
                 <a:ea typeface="Pretendard Variable" panose="02000003000000020004" pitchFamily="2" charset="-127"/>
                 <a:cs typeface="Pretendard Variable" panose="02000003000000020004" pitchFamily="2" charset="-127"/>
               </a:rPr>
-              <a:t>: 2026-10-10</a:t>
+              <a:t>: 2026-10-01</a:t>
             </a:r>
             <a:endParaRPr lang="ko-KR" altLang="en-US" sz="2800" dirty="0">
               <a:latin typeface="Pretendard Variable" panose="02000003000000020004" pitchFamily="2" charset="-127"/>
